--- a/data/samples/reports/sample_data_large/dashboard.pptx
+++ b/data/samples/reports/sample_data_large/dashboard.pptx
@@ -6,6 +6,7 @@
   </p:sldMasterIdLst>
   <p:sldIdLst>
     <p:sldId id="256" r:id="rId6"/>
+    <p:sldId id="257" r:id="rId7"/>
   </p:sldIdLst>
   <p:sldSz cx="9144000" cy="6858000" type="screen4x3"/>
   <p:notesSz cx="6858000" cy="9144000"/>
@@ -3082,7 +3083,7 @@
             <a:spLocks noGrp="1"/>
           </p:cNvSpPr>
           <p:nvPr>
-            <p:ph type="title"/>
+            <p:ph type="ctrTitle"/>
           </p:nvPr>
         </p:nvSpPr>
         <p:spPr/>
@@ -3098,42 +3099,259 @@
           </a:p>
         </p:txBody>
       </p:sp>
-      <p:pic>
-        <p:nvPicPr>
-          <p:cNvPr id="4" name="Content Placeholder 3"/>
-          <p:cNvPicPr>
-            <a:picLocks noChangeAspect="1" noGrp="1"/>
-          </p:cNvPicPr>
-          <p:nvPr>
-            <p:ph idx="1"/>
-          </p:nvPr>
-        </p:nvPicPr>
-        <p:blipFill>
-          <a:blip r:embed="rId2">
-            <a:extLst>
-              <a:ext uri="{28A0092B-C50C-407E-A947-70E740481C1C}">
-                <a14:useLocalDpi xmlns:a14="http://schemas.microsoft.com/office/drawing/2010/main" val="0"/>
-              </a:ext>
-            </a:extLst>
-          </a:blip>
-          <a:stretch>
-            <a:fillRect/>
-          </a:stretch>
-        </p:blipFill>
-        <p:spPr>
-          <a:xfrm>
-            <a:off x="1079500" y="1524000"/>
-            <a:ext cx="6985000" cy="4938300"/>
-          </a:xfrm>
-          <a:prstGeom prst="rect">
-            <a:avLst/>
-          </a:prstGeom>
-        </p:spPr>
-      </p:pic>
+      <p:sp>
+        <p:nvSpPr>
+          <p:cNvPr id="3" name="Subtitle 2"/>
+          <p:cNvSpPr>
+            <a:spLocks noGrp="1"/>
+          </p:cNvSpPr>
+          <p:nvPr>
+            <p:ph idx="1" type="subTitle"/>
+          </p:nvPr>
+        </p:nvSpPr>
+        <p:spPr/>
+        <p:txBody>
+          <a:bodyPr/>
+          <a:lstStyle/>
+          <a:p>
+            <a:r>
+              <a:rPr lang="en-US" smtClean="0"/>
+              <a:t>Generated on 2026-05-12 23:19</a:t>
+            </a:r>
+            <a:endParaRPr lang="en-US"/>
+          </a:p>
+        </p:txBody>
+      </p:sp>
     </p:spTree>
     <p:extLst>
       <p:ext uri="{BB962C8B-B14F-4D97-AF65-F5344CB8AC3E}">
-        <p14:creationId xmlns:p14="http://schemas.microsoft.com/office/powerpoint/2010/main" val="1474098577"/>
+        <p14:creationId xmlns:p14="http://schemas.microsoft.com/office/powerpoint/2010/main" val="1633108117"/>
+      </p:ext>
+    </p:extLst>
+  </p:cSld>
+  <p:clrMapOvr>
+    <a:masterClrMapping/>
+  </p:clrMapOvr>
+</p:sld>
+</file>
+
+<file path=ppt/slides/slide2.xml><?xml version="1.0" encoding="utf-8"?>
+<p:sld xmlns:a="http://schemas.openxmlformats.org/drawingml/2006/main" xmlns:p="http://schemas.openxmlformats.org/presentationml/2006/main" xmlns:r="http://schemas.openxmlformats.org/officeDocument/2006/relationships">
+  <p:cSld>
+    <p:spTree>
+      <p:nvGrpSpPr>
+        <p:cNvPr id="1" name=""/>
+        <p:cNvGrpSpPr/>
+        <p:nvPr/>
+      </p:nvGrpSpPr>
+      <p:grpSpPr>
+        <a:xfrm>
+          <a:off x="0" y="0"/>
+          <a:ext cx="0" cy="0"/>
+          <a:chOff x="0" y="0"/>
+          <a:chExt cx="0" cy="0"/>
+        </a:xfrm>
+      </p:grpSpPr>
+      <p:sp>
+        <p:nvSpPr>
+          <p:cNvPr id="2" name="Title 1"/>
+          <p:cNvSpPr>
+            <a:spLocks noGrp="1"/>
+          </p:cNvSpPr>
+          <p:nvPr>
+            <p:ph type="title"/>
+          </p:nvPr>
+        </p:nvSpPr>
+        <p:spPr/>
+        <p:txBody>
+          <a:bodyPr/>
+          <a:lstStyle/>
+          <a:p>
+            <a:r>
+              <a:rPr dirty="0" lang="en-US" smtClean="0"/>
+              <a:t>Flow Metrics Summary</a:t>
+            </a:r>
+            <a:endParaRPr dirty="0" lang="en-US"/>
+          </a:p>
+        </p:txBody>
+      </p:sp>
+      <p:sp>
+        <p:nvSpPr>
+          <p:cNvPr id="3" name="Content Placeholder 2"/>
+          <p:cNvSpPr>
+            <a:spLocks noGrp="1"/>
+          </p:cNvSpPr>
+          <p:nvPr>
+            <p:ph idx="1"/>
+          </p:nvPr>
+        </p:nvSpPr>
+        <p:spPr/>
+        <p:txBody>
+          <a:bodyPr/>
+          <a:lstStyle/>
+          <a:p>
+            <a:r>
+              <a:rPr dirty="0" lang="en-US" smtClean="0"/>
+              <a:t>Flow Metrics Summary</a:t>
+            </a:r>
+          </a:p>
+          <a:p>
+            <a:r>
+              <a:rPr dirty="0" lang="en-US" smtClean="0"/>
+              <a:t>--------------------</a:t>
+            </a:r>
+          </a:p>
+          <a:p>
+            <a:r>
+              <a:rPr dirty="0" lang="en-US" smtClean="0"/>
+              <a:t>Total Items: 200</a:t>
+            </a:r>
+          </a:p>
+          <a:p>
+            <a:r>
+              <a:rPr dirty="0" lang="en-US" smtClean="0"/>
+              <a:t>Completed Items: 150</a:t>
+            </a:r>
+          </a:p>
+          <a:p>
+            <a:r>
+              <a:rPr dirty="0" lang="en-US" smtClean="0"/>
+              <a:t>Average Throughput: 0.97 items/day</a:t>
+            </a:r>
+          </a:p>
+          <a:p>
+            <a:r>
+              <a:rPr dirty="0" lang="en-US" smtClean="0"/>
+              <a:t>Priority Breakdown:</a:t>
+            </a:r>
+          </a:p>
+          <a:p>
+            <a:r>
+              <a:rPr dirty="0" lang="en-US" smtClean="0"/>
+              <a:t>Highest: 6</a:t>
+            </a:r>
+          </a:p>
+          <a:p>
+            <a:r>
+              <a:rPr dirty="0" lang="en-US" smtClean="0"/>
+              <a:t>High: 35</a:t>
+            </a:r>
+          </a:p>
+          <a:p>
+            <a:r>
+              <a:rPr dirty="0" lang="en-US" smtClean="0"/>
+              <a:t>Medium: 68</a:t>
+            </a:r>
+          </a:p>
+          <a:p>
+            <a:r>
+              <a:rPr dirty="0" lang="en-US" smtClean="0"/>
+              <a:t>Low: 31</a:t>
+            </a:r>
+          </a:p>
+          <a:p>
+            <a:r>
+              <a:rPr dirty="0" lang="en-US" smtClean="0"/>
+              <a:t>Lowest: 10</a:t>
+            </a:r>
+          </a:p>
+          <a:p>
+            <a:r>
+              <a:rPr dirty="0" lang="en-US" smtClean="0"/>
+              <a:t>Type Breakdown:</a:t>
+            </a:r>
+          </a:p>
+          <a:p>
+            <a:r>
+              <a:rPr dirty="0" lang="en-US" smtClean="0"/>
+              <a:t>Improvement: 39</a:t>
+            </a:r>
+          </a:p>
+          <a:p>
+            <a:r>
+              <a:rPr dirty="0" lang="en-US" smtClean="0"/>
+              <a:t>Story: 37</a:t>
+            </a:r>
+          </a:p>
+          <a:p>
+            <a:r>
+              <a:rPr dirty="0" lang="en-US" smtClean="0"/>
+              <a:t>Bug: 37</a:t>
+            </a:r>
+          </a:p>
+          <a:p>
+            <a:r>
+              <a:rPr dirty="0" lang="en-US" smtClean="0"/>
+              <a:t>Task: 37</a:t>
+            </a:r>
+          </a:p>
+          <a:p>
+            <a:r>
+              <a:rPr dirty="0" lang="en-US" smtClean="0"/>
+              <a:t>Aging WIP Summary:</a:t>
+            </a:r>
+          </a:p>
+          <a:p>
+            <a:r>
+              <a:rPr dirty="0" lang="en-US" smtClean="0"/>
+              <a:t>Active WIP: 50 items</a:t>
+            </a:r>
+          </a:p>
+          <a:p>
+            <a:r>
+              <a:rPr dirty="0" lang="en-US" smtClean="0"/>
+              <a:t>Average WIP Age: 54.6 days</a:t>
+            </a:r>
+          </a:p>
+          <a:p>
+            <a:r>
+              <a:rPr dirty="0" lang="en-US" smtClean="0"/>
+              <a:t>Oldest Item Age: 75 days</a:t>
+            </a:r>
+          </a:p>
+          <a:p>
+            <a:r>
+              <a:rPr dirty="0" lang="en-US" smtClean="0"/>
+              <a:t>Cycle Time Percentiles:</a:t>
+            </a:r>
+          </a:p>
+          <a:p>
+            <a:r>
+              <a:rPr dirty="0" lang="en-US" smtClean="0"/>
+              <a:t>50th Percentile: 11 days</a:t>
+            </a:r>
+          </a:p>
+          <a:p>
+            <a:r>
+              <a:rPr dirty="0" lang="en-US" smtClean="0"/>
+              <a:t>75th Percentile: 17 days</a:t>
+            </a:r>
+          </a:p>
+          <a:p>
+            <a:r>
+              <a:rPr dirty="0" lang="en-US" smtClean="0"/>
+              <a:t>85th Percentile: 19 days</a:t>
+            </a:r>
+          </a:p>
+          <a:p>
+            <a:r>
+              <a:rPr dirty="0" lang="en-US" smtClean="0"/>
+              <a:t>95th Percentile: 21 days</a:t>
+            </a:r>
+          </a:p>
+          <a:p>
+            <a:r>
+              <a:rPr dirty="0" lang="en-US" smtClean="0"/>
+              <a:t>98th Percentile: 21 days</a:t>
+            </a:r>
+            <a:endParaRPr lang="en-US"/>
+          </a:p>
+        </p:txBody>
+      </p:sp>
+    </p:spTree>
+    <p:extLst>
+      <p:ext uri="{BB962C8B-B14F-4D97-AF65-F5344CB8AC3E}">
+        <p14:creationId xmlns:p14="http://schemas.microsoft.com/office/powerpoint/2010/main" val="1231192379"/>
       </p:ext>
     </p:extLst>
   </p:cSld>

--- a/data/samples/reports/sample_data_large/dashboard.pptx
+++ b/data/samples/reports/sample_data_large/dashboard.pptx
@@ -3116,7 +3116,7 @@
           <a:p>
             <a:r>
               <a:rPr lang="en-US" smtClean="0"/>
-              <a:t>Generated on 2026-05-12 23:19</a:t>
+              <a:t>Generated on 2026-05-12 23:20</a:t>
             </a:r>
             <a:endParaRPr lang="en-US"/>
           </a:p>

--- a/data/samples/reports/sample_data_large/dashboard.pptx
+++ b/data/samples/reports/sample_data_large/dashboard.pptx
@@ -3116,7 +3116,7 @@
           <a:p>
             <a:r>
               <a:rPr lang="en-US" smtClean="0"/>
-              <a:t>Generated on 2026-05-12 23:20</a:t>
+              <a:t>Generated on 2026-05-13 06:39</a:t>
             </a:r>
             <a:endParaRPr lang="en-US"/>
           </a:p>
@@ -3300,13 +3300,13 @@
           <a:p>
             <a:r>
               <a:rPr dirty="0" lang="en-US" smtClean="0"/>
-              <a:t>Average WIP Age: 54.6 days</a:t>
+              <a:t>Average WIP Age: 55.6 days</a:t>
             </a:r>
           </a:p>
           <a:p>
             <a:r>
               <a:rPr dirty="0" lang="en-US" smtClean="0"/>
-              <a:t>Oldest Item Age: 75 days</a:t>
+              <a:t>Oldest Item Age: 76 days</a:t>
             </a:r>
           </a:p>
           <a:p>

--- a/data/samples/reports/sample_data_large/dashboard.pptx
+++ b/data/samples/reports/sample_data_large/dashboard.pptx
@@ -3116,7 +3116,7 @@
           <a:p>
             <a:r>
               <a:rPr lang="en-US" smtClean="0"/>
-              <a:t>Generated on 2026-05-13 06:39</a:t>
+              <a:t>Generated on 2026-05-13 06:42</a:t>
             </a:r>
             <a:endParaRPr lang="en-US"/>
           </a:p>

--- a/data/samples/reports/sample_data_large/dashboard.pptx
+++ b/data/samples/reports/sample_data_large/dashboard.pptx
@@ -3116,7 +3116,7 @@
           <a:p>
             <a:r>
               <a:rPr lang="en-US" smtClean="0"/>
-              <a:t>Generated on 2026-05-13 06:42</a:t>
+              <a:t>Generated on 2026-05-13 06:43</a:t>
             </a:r>
             <a:endParaRPr lang="en-US"/>
           </a:p>

--- a/data/samples/reports/sample_data_large/dashboard.pptx
+++ b/data/samples/reports/sample_data_large/dashboard.pptx
@@ -3116,7 +3116,7 @@
           <a:p>
             <a:r>
               <a:rPr lang="en-US" smtClean="0"/>
-              <a:t>Generated on 2026-05-13 06:43</a:t>
+              <a:t>Generated on 2026-05-13 06:44</a:t>
             </a:r>
             <a:endParaRPr lang="en-US"/>
           </a:p>

--- a/data/samples/reports/sample_data_large/dashboard.pptx
+++ b/data/samples/reports/sample_data_large/dashboard.pptx
@@ -3116,7 +3116,7 @@
           <a:p>
             <a:r>
               <a:rPr lang="en-US" smtClean="0"/>
-              <a:t>Generated on 2026-05-13 06:44</a:t>
+              <a:t>Generated on 2026-05-15 20:52</a:t>
             </a:r>
             <a:endParaRPr lang="en-US"/>
           </a:p>
@@ -3300,13 +3300,13 @@
           <a:p>
             <a:r>
               <a:rPr dirty="0" lang="en-US" smtClean="0"/>
-              <a:t>Average WIP Age: 55.6 days</a:t>
+              <a:t>Average WIP Age: 57.6 days</a:t>
             </a:r>
           </a:p>
           <a:p>
             <a:r>
               <a:rPr dirty="0" lang="en-US" smtClean="0"/>
-              <a:t>Oldest Item Age: 76 days</a:t>
+              <a:t>Oldest Item Age: 78 days</a:t>
             </a:r>
           </a:p>
           <a:p>

--- a/data/samples/reports/sample_data_large/dashboard.pptx
+++ b/data/samples/reports/sample_data_large/dashboard.pptx
@@ -3116,7 +3116,7 @@
           <a:p>
             <a:r>
               <a:rPr lang="en-US" smtClean="0"/>
-              <a:t>Generated on 2026-05-15 20:52</a:t>
+              <a:t>Generated on 2026-05-16 08:10</a:t>
             </a:r>
             <a:endParaRPr lang="en-US"/>
           </a:p>
@@ -3300,13 +3300,13 @@
           <a:p>
             <a:r>
               <a:rPr dirty="0" lang="en-US" smtClean="0"/>
-              <a:t>Average WIP Age: 57.6 days</a:t>
+              <a:t>Average WIP Age: 58.6 days</a:t>
             </a:r>
           </a:p>
           <a:p>
             <a:r>
               <a:rPr dirty="0" lang="en-US" smtClean="0"/>
-              <a:t>Oldest Item Age: 78 days</a:t>
+              <a:t>Oldest Item Age: 79 days</a:t>
             </a:r>
           </a:p>
           <a:p>

--- a/data/samples/reports/sample_data_large/dashboard.pptx
+++ b/data/samples/reports/sample_data_large/dashboard.pptx
@@ -3116,7 +3116,7 @@
           <a:p>
             <a:r>
               <a:rPr lang="en-US" smtClean="0"/>
-              <a:t>Generated on 2026-05-16 08:10</a:t>
+              <a:t>Generated on 2026-05-16 08:18</a:t>
             </a:r>
             <a:endParaRPr lang="en-US"/>
           </a:p>

--- a/data/samples/reports/sample_data_large/dashboard.pptx
+++ b/data/samples/reports/sample_data_large/dashboard.pptx
@@ -3116,7 +3116,7 @@
           <a:p>
             <a:r>
               <a:rPr lang="en-US" smtClean="0"/>
-              <a:t>Generated on 2026-05-16 08:18</a:t>
+              <a:t>Generated on 2026-05-16 08:24</a:t>
             </a:r>
             <a:endParaRPr lang="en-US"/>
           </a:p>

--- a/data/samples/reports/sample_data_large/dashboard.pptx
+++ b/data/samples/reports/sample_data_large/dashboard.pptx
@@ -3116,7 +3116,7 @@
           <a:p>
             <a:r>
               <a:rPr lang="en-US" smtClean="0"/>
-              <a:t>Generated on 2026-05-16 08:24</a:t>
+              <a:t>Generated on 2026-05-16 08:35</a:t>
             </a:r>
             <a:endParaRPr lang="en-US"/>
           </a:p>

--- a/data/samples/reports/sample_data_large/dashboard.pptx
+++ b/data/samples/reports/sample_data_large/dashboard.pptx
@@ -6,7 +6,6 @@
   </p:sldMasterIdLst>
   <p:sldIdLst>
     <p:sldId id="256" r:id="rId6"/>
-    <p:sldId id="257" r:id="rId7"/>
   </p:sldIdLst>
   <p:sldSz cx="9144000" cy="6858000" type="screen4x3"/>
   <p:notesSz cx="6858000" cy="9144000"/>
@@ -3083,7 +3082,7 @@
             <a:spLocks noGrp="1"/>
           </p:cNvSpPr>
           <p:nvPr>
-            <p:ph type="ctrTitle"/>
+            <p:ph type="title"/>
           </p:nvPr>
         </p:nvSpPr>
         <p:spPr/>
@@ -3099,259 +3098,42 @@
           </a:p>
         </p:txBody>
       </p:sp>
-      <p:sp>
-        <p:nvSpPr>
-          <p:cNvPr id="3" name="Subtitle 2"/>
-          <p:cNvSpPr>
-            <a:spLocks noGrp="1"/>
-          </p:cNvSpPr>
-          <p:nvPr>
-            <p:ph idx="1" type="subTitle"/>
-          </p:nvPr>
-        </p:nvSpPr>
-        <p:spPr/>
-        <p:txBody>
-          <a:bodyPr/>
-          <a:lstStyle/>
-          <a:p>
-            <a:r>
-              <a:rPr lang="en-US" smtClean="0"/>
-              <a:t>Generated on 2026-05-16 08:35</a:t>
-            </a:r>
-            <a:endParaRPr lang="en-US"/>
-          </a:p>
-        </p:txBody>
-      </p:sp>
+      <p:pic>
+        <p:nvPicPr>
+          <p:cNvPr id="4" name="Content Placeholder 3"/>
+          <p:cNvPicPr>
+            <a:picLocks noChangeAspect="1" noGrp="1"/>
+          </p:cNvPicPr>
+          <p:nvPr>
+            <p:ph idx="1"/>
+          </p:nvPr>
+        </p:nvPicPr>
+        <p:blipFill>
+          <a:blip r:embed="rId2">
+            <a:extLst>
+              <a:ext uri="{28A0092B-C50C-407E-A947-70E740481C1C}">
+                <a14:useLocalDpi xmlns:a14="http://schemas.microsoft.com/office/drawing/2010/main" val="0"/>
+              </a:ext>
+            </a:extLst>
+          </a:blip>
+          <a:stretch>
+            <a:fillRect/>
+          </a:stretch>
+        </p:blipFill>
+        <p:spPr>
+          <a:xfrm>
+            <a:off x="1079500" y="1524000"/>
+            <a:ext cx="6985000" cy="4938300"/>
+          </a:xfrm>
+          <a:prstGeom prst="rect">
+            <a:avLst/>
+          </a:prstGeom>
+        </p:spPr>
+      </p:pic>
     </p:spTree>
     <p:extLst>
       <p:ext uri="{BB962C8B-B14F-4D97-AF65-F5344CB8AC3E}">
-        <p14:creationId xmlns:p14="http://schemas.microsoft.com/office/powerpoint/2010/main" val="1633108117"/>
-      </p:ext>
-    </p:extLst>
-  </p:cSld>
-  <p:clrMapOvr>
-    <a:masterClrMapping/>
-  </p:clrMapOvr>
-</p:sld>
-</file>
-
-<file path=ppt/slides/slide2.xml><?xml version="1.0" encoding="utf-8"?>
-<p:sld xmlns:a="http://schemas.openxmlformats.org/drawingml/2006/main" xmlns:p="http://schemas.openxmlformats.org/presentationml/2006/main" xmlns:r="http://schemas.openxmlformats.org/officeDocument/2006/relationships">
-  <p:cSld>
-    <p:spTree>
-      <p:nvGrpSpPr>
-        <p:cNvPr id="1" name=""/>
-        <p:cNvGrpSpPr/>
-        <p:nvPr/>
-      </p:nvGrpSpPr>
-      <p:grpSpPr>
-        <a:xfrm>
-          <a:off x="0" y="0"/>
-          <a:ext cx="0" cy="0"/>
-          <a:chOff x="0" y="0"/>
-          <a:chExt cx="0" cy="0"/>
-        </a:xfrm>
-      </p:grpSpPr>
-      <p:sp>
-        <p:nvSpPr>
-          <p:cNvPr id="2" name="Title 1"/>
-          <p:cNvSpPr>
-            <a:spLocks noGrp="1"/>
-          </p:cNvSpPr>
-          <p:nvPr>
-            <p:ph type="title"/>
-          </p:nvPr>
-        </p:nvSpPr>
-        <p:spPr/>
-        <p:txBody>
-          <a:bodyPr/>
-          <a:lstStyle/>
-          <a:p>
-            <a:r>
-              <a:rPr dirty="0" lang="en-US" smtClean="0"/>
-              <a:t>Flow Metrics Summary</a:t>
-            </a:r>
-            <a:endParaRPr dirty="0" lang="en-US"/>
-          </a:p>
-        </p:txBody>
-      </p:sp>
-      <p:sp>
-        <p:nvSpPr>
-          <p:cNvPr id="3" name="Content Placeholder 2"/>
-          <p:cNvSpPr>
-            <a:spLocks noGrp="1"/>
-          </p:cNvSpPr>
-          <p:nvPr>
-            <p:ph idx="1"/>
-          </p:nvPr>
-        </p:nvSpPr>
-        <p:spPr/>
-        <p:txBody>
-          <a:bodyPr/>
-          <a:lstStyle/>
-          <a:p>
-            <a:r>
-              <a:rPr dirty="0" lang="en-US" smtClean="0"/>
-              <a:t>Flow Metrics Summary</a:t>
-            </a:r>
-          </a:p>
-          <a:p>
-            <a:r>
-              <a:rPr dirty="0" lang="en-US" smtClean="0"/>
-              <a:t>--------------------</a:t>
-            </a:r>
-          </a:p>
-          <a:p>
-            <a:r>
-              <a:rPr dirty="0" lang="en-US" smtClean="0"/>
-              <a:t>Total Items: 200</a:t>
-            </a:r>
-          </a:p>
-          <a:p>
-            <a:r>
-              <a:rPr dirty="0" lang="en-US" smtClean="0"/>
-              <a:t>Completed Items: 150</a:t>
-            </a:r>
-          </a:p>
-          <a:p>
-            <a:r>
-              <a:rPr dirty="0" lang="en-US" smtClean="0"/>
-              <a:t>Average Throughput: 0.97 items/day</a:t>
-            </a:r>
-          </a:p>
-          <a:p>
-            <a:r>
-              <a:rPr dirty="0" lang="en-US" smtClean="0"/>
-              <a:t>Priority Breakdown:</a:t>
-            </a:r>
-          </a:p>
-          <a:p>
-            <a:r>
-              <a:rPr dirty="0" lang="en-US" smtClean="0"/>
-              <a:t>Highest: 6</a:t>
-            </a:r>
-          </a:p>
-          <a:p>
-            <a:r>
-              <a:rPr dirty="0" lang="en-US" smtClean="0"/>
-              <a:t>High: 35</a:t>
-            </a:r>
-          </a:p>
-          <a:p>
-            <a:r>
-              <a:rPr dirty="0" lang="en-US" smtClean="0"/>
-              <a:t>Medium: 68</a:t>
-            </a:r>
-          </a:p>
-          <a:p>
-            <a:r>
-              <a:rPr dirty="0" lang="en-US" smtClean="0"/>
-              <a:t>Low: 31</a:t>
-            </a:r>
-          </a:p>
-          <a:p>
-            <a:r>
-              <a:rPr dirty="0" lang="en-US" smtClean="0"/>
-              <a:t>Lowest: 10</a:t>
-            </a:r>
-          </a:p>
-          <a:p>
-            <a:r>
-              <a:rPr dirty="0" lang="en-US" smtClean="0"/>
-              <a:t>Type Breakdown:</a:t>
-            </a:r>
-          </a:p>
-          <a:p>
-            <a:r>
-              <a:rPr dirty="0" lang="en-US" smtClean="0"/>
-              <a:t>Improvement: 39</a:t>
-            </a:r>
-          </a:p>
-          <a:p>
-            <a:r>
-              <a:rPr dirty="0" lang="en-US" smtClean="0"/>
-              <a:t>Story: 37</a:t>
-            </a:r>
-          </a:p>
-          <a:p>
-            <a:r>
-              <a:rPr dirty="0" lang="en-US" smtClean="0"/>
-              <a:t>Bug: 37</a:t>
-            </a:r>
-          </a:p>
-          <a:p>
-            <a:r>
-              <a:rPr dirty="0" lang="en-US" smtClean="0"/>
-              <a:t>Task: 37</a:t>
-            </a:r>
-          </a:p>
-          <a:p>
-            <a:r>
-              <a:rPr dirty="0" lang="en-US" smtClean="0"/>
-              <a:t>Aging WIP Summary:</a:t>
-            </a:r>
-          </a:p>
-          <a:p>
-            <a:r>
-              <a:rPr dirty="0" lang="en-US" smtClean="0"/>
-              <a:t>Active WIP: 50 items</a:t>
-            </a:r>
-          </a:p>
-          <a:p>
-            <a:r>
-              <a:rPr dirty="0" lang="en-US" smtClean="0"/>
-              <a:t>Average WIP Age: 58.6 days</a:t>
-            </a:r>
-          </a:p>
-          <a:p>
-            <a:r>
-              <a:rPr dirty="0" lang="en-US" smtClean="0"/>
-              <a:t>Oldest Item Age: 79 days</a:t>
-            </a:r>
-          </a:p>
-          <a:p>
-            <a:r>
-              <a:rPr dirty="0" lang="en-US" smtClean="0"/>
-              <a:t>Cycle Time Percentiles:</a:t>
-            </a:r>
-          </a:p>
-          <a:p>
-            <a:r>
-              <a:rPr dirty="0" lang="en-US" smtClean="0"/>
-              <a:t>50th Percentile: 11 days</a:t>
-            </a:r>
-          </a:p>
-          <a:p>
-            <a:r>
-              <a:rPr dirty="0" lang="en-US" smtClean="0"/>
-              <a:t>75th Percentile: 17 days</a:t>
-            </a:r>
-          </a:p>
-          <a:p>
-            <a:r>
-              <a:rPr dirty="0" lang="en-US" smtClean="0"/>
-              <a:t>85th Percentile: 19 days</a:t>
-            </a:r>
-          </a:p>
-          <a:p>
-            <a:r>
-              <a:rPr dirty="0" lang="en-US" smtClean="0"/>
-              <a:t>95th Percentile: 21 days</a:t>
-            </a:r>
-          </a:p>
-          <a:p>
-            <a:r>
-              <a:rPr dirty="0" lang="en-US" smtClean="0"/>
-              <a:t>98th Percentile: 21 days</a:t>
-            </a:r>
-            <a:endParaRPr lang="en-US"/>
-          </a:p>
-        </p:txBody>
-      </p:sp>
-    </p:spTree>
-    <p:extLst>
-      <p:ext uri="{BB962C8B-B14F-4D97-AF65-F5344CB8AC3E}">
-        <p14:creationId xmlns:p14="http://schemas.microsoft.com/office/powerpoint/2010/main" val="1231192379"/>
+        <p14:creationId xmlns:p14="http://schemas.microsoft.com/office/powerpoint/2010/main" val="1474098577"/>
       </p:ext>
     </p:extLst>
   </p:cSld>
